--- a/templates/posts/october/06-10-2026-tue-ig-mentor-carla-portugal.pptx
+++ b/templates/posts/october/06-10-2026-tue-ig-mentor-carla-portugal.pptx
@@ -502,7 +502,7 @@
           <a:lstStyle/>
           <a:p>
             <a:r>
-              <a:t>First 'Meet our mentors' post; posts 8 to 10 reuse this layout. No photo of Carla at a microscope in the library; this is her headshot (499 px, upscaled: ask for a larger file or a microscope photo) [PHOTO NEEDED: higher resolution].</a:t>
+              <a:t>First 'Meet our mentors' post; posts 8 to 10 reuse this layout. No photo of Carla at a microscope in the library; this is her headshot (499 px, upscaled: ask for a larger file or a microscope photo) [PHOTO NEEDED: higher resolution]. Stickers are drawn shapes.</a:t>
             </a:r>
           </a:p>
         </p:txBody>
@@ -3504,7 +3504,7 @@
     <p:bg>
       <p:bgPr>
         <a:solidFill>
-          <a:srgbClr val="22371F"/>
+          <a:srgbClr val="F4F1EA"/>
         </a:solidFill>
         <a:effectLst/>
       </p:bgPr>
@@ -3518,7 +3518,7 @@
       <p:grpSpPr/>
       <p:pic>
         <p:nvPicPr>
-          <p:cNvPr id="2" name="Picture 1" descr="8306993219032557683.jpg"/>
+          <p:cNvPr id="2" name="Picture 1" descr="paper-grain-cream.jpg"/>
           <p:cNvPicPr>
             <a:picLocks noChangeAspect="1"/>
           </p:cNvPicPr>
@@ -3533,7 +3533,7 @@
         <p:spPr>
           <a:xfrm>
             <a:off x="0" y="0"/>
-            <a:ext cx="10287000" cy="8362950"/>
+            <a:ext cx="10287000" cy="12858750"/>
           </a:xfrm>
           <a:prstGeom prst="rect">
             <a:avLst/>
@@ -3543,6 +3543,172 @@
       <p:sp>
         <p:nvSpPr>
           <p:cNvPr id="3" name="Rectangle 2"/>
+          <p:cNvSpPr/>
+          <p:nvPr/>
+        </p:nvSpPr>
+        <p:spPr>
+          <a:xfrm rot="21480000">
+            <a:off x="476250" y="381000"/>
+            <a:ext cx="9334500" cy="7810500"/>
+          </a:xfrm>
+          <a:prstGeom prst="rect">
+            <a:avLst/>
+          </a:prstGeom>
+          <a:solidFill>
+            <a:srgbClr val="FFFDF7"/>
+          </a:solidFill>
+          <a:ln>
+            <a:noFill/>
+          </a:ln>
+          <a:effectLst>
+            <a:outerShdw blurRad="228600" dist="76200" dir="5400000" algn="t" rotWithShape="0">
+              <a:srgbClr val="000000">
+                <a:alpha val="30000"/>
+              </a:srgbClr>
+            </a:outerShdw>
+          </a:effectLst>
+        </p:spPr>
+        <p:style>
+          <a:lnRef idx="1">
+            <a:schemeClr val="accent1"/>
+          </a:lnRef>
+          <a:fillRef idx="3">
+            <a:schemeClr val="accent1"/>
+          </a:fillRef>
+          <a:effectRef idx="2">
+            <a:schemeClr val="accent1"/>
+          </a:effectRef>
+          <a:fontRef idx="minor">
+            <a:schemeClr val="lt1"/>
+          </a:fontRef>
+        </p:style>
+        <p:txBody>
+          <a:bodyPr rtlCol="0" anchor="ctr"/>
+          <a:lstStyle/>
+          <a:p>
+            <a:pPr algn="ctr"/>
+          </a:p>
+        </p:txBody>
+      </p:sp>
+      <p:pic>
+        <p:nvPicPr>
+          <p:cNvPr id="4" name="Picture 3" descr="4633380543607938633.jpg"/>
+          <p:cNvPicPr>
+            <a:picLocks noChangeAspect="1"/>
+          </p:cNvPicPr>
+          <p:nvPr/>
+        </p:nvPicPr>
+        <p:blipFill>
+          <a:blip r:embed="rId4"/>
+          <a:stretch>
+            <a:fillRect/>
+          </a:stretch>
+        </p:blipFill>
+        <p:spPr>
+          <a:xfrm rot="21480000">
+            <a:off x="666750" y="571500"/>
+            <a:ext cx="8953500" cy="7429500"/>
+          </a:xfrm>
+          <a:prstGeom prst="rect">
+            <a:avLst/>
+          </a:prstGeom>
+        </p:spPr>
+      </p:pic>
+      <p:sp>
+        <p:nvSpPr>
+          <p:cNvPr id="5" name="Rectangle 4"/>
+          <p:cNvSpPr/>
+          <p:nvPr/>
+        </p:nvSpPr>
+        <p:spPr>
+          <a:xfrm rot="19800000">
+            <a:off x="285750" y="323850"/>
+            <a:ext cx="1714500" cy="495300"/>
+          </a:xfrm>
+          <a:prstGeom prst="rect">
+            <a:avLst/>
+          </a:prstGeom>
+          <a:solidFill>
+            <a:srgbClr val="DBE6A7">
+              <a:alpha val="70000"/>
+            </a:srgbClr>
+          </a:solidFill>
+          <a:ln>
+            <a:noFill/>
+          </a:ln>
+          <a:effectLst/>
+        </p:spPr>
+        <p:style>
+          <a:lnRef idx="1">
+            <a:schemeClr val="accent1"/>
+          </a:lnRef>
+          <a:fillRef idx="3">
+            <a:schemeClr val="accent1"/>
+          </a:fillRef>
+          <a:effectRef idx="2">
+            <a:schemeClr val="accent1"/>
+          </a:effectRef>
+          <a:fontRef idx="minor">
+            <a:schemeClr val="lt1"/>
+          </a:fontRef>
+        </p:style>
+        <p:txBody>
+          <a:bodyPr rtlCol="0" anchor="ctr"/>
+          <a:lstStyle/>
+          <a:p>
+            <a:pPr algn="ctr"/>
+          </a:p>
+        </p:txBody>
+      </p:sp>
+      <p:sp>
+        <p:nvSpPr>
+          <p:cNvPr id="6" name="Rectangle 5"/>
+          <p:cNvSpPr/>
+          <p:nvPr/>
+        </p:nvSpPr>
+        <p:spPr>
+          <a:xfrm rot="1800000">
+            <a:off x="8286750" y="323850"/>
+            <a:ext cx="1714500" cy="495300"/>
+          </a:xfrm>
+          <a:prstGeom prst="rect">
+            <a:avLst/>
+          </a:prstGeom>
+          <a:solidFill>
+            <a:srgbClr val="DBE6A7">
+              <a:alpha val="70000"/>
+            </a:srgbClr>
+          </a:solidFill>
+          <a:ln>
+            <a:noFill/>
+          </a:ln>
+          <a:effectLst/>
+        </p:spPr>
+        <p:style>
+          <a:lnRef idx="1">
+            <a:schemeClr val="accent1"/>
+          </a:lnRef>
+          <a:fillRef idx="3">
+            <a:schemeClr val="accent1"/>
+          </a:fillRef>
+          <a:effectRef idx="2">
+            <a:schemeClr val="accent1"/>
+          </a:effectRef>
+          <a:fontRef idx="minor">
+            <a:schemeClr val="lt1"/>
+          </a:fontRef>
+        </p:style>
+        <p:txBody>
+          <a:bodyPr rtlCol="0" anchor="ctr"/>
+          <a:lstStyle/>
+          <a:p>
+            <a:pPr algn="ctr"/>
+          </a:p>
+        </p:txBody>
+      </p:sp>
+      <p:sp>
+        <p:nvSpPr>
+          <p:cNvPr id="7" name="Rectangle 6"/>
           <p:cNvSpPr/>
           <p:nvPr/>
         </p:nvSpPr>
@@ -3586,21 +3752,21 @@
       </p:sp>
       <p:pic>
         <p:nvPicPr>
-          <p:cNvPr id="4" name="Picture 3" descr="trim-dried-flowers-2-1.png"/>
+          <p:cNvPr id="8" name="Picture 7" descr="trim-dried-flowers-2-1.png"/>
           <p:cNvPicPr>
             <a:picLocks noChangeAspect="1"/>
           </p:cNvPicPr>
           <p:nvPr/>
         </p:nvPicPr>
         <p:blipFill>
-          <a:blip r:embed="rId4"/>
+          <a:blip r:embed="rId5"/>
           <a:stretch>
             <a:fillRect/>
           </a:stretch>
         </p:blipFill>
         <p:spPr>
           <a:xfrm rot="1680000">
-            <a:off x="8477250" y="6161822"/>
+            <a:off x="8477250" y="6352322"/>
             <a:ext cx="1809750" cy="2725855"/>
           </a:xfrm>
           <a:prstGeom prst="rect">
@@ -3608,9 +3774,348 @@
           </a:prstGeom>
         </p:spPr>
       </p:pic>
-      <p:sp>
-        <p:nvSpPr>
-          <p:cNvPr id="5" name="Rounded Rectangle 4"/>
+      <p:grpSp>
+        <p:nvGrpSpPr>
+          <p:cNvPr id="9" name="Group 8"/>
+          <p:cNvGrpSpPr/>
+          <p:nvPr/>
+        </p:nvGrpSpPr>
+        <p:grpSpPr>
+          <a:xfrm>
+            <a:off x="0" y="0"/>
+            <a:ext cx="9763125" cy="11410950"/>
+            <a:chOff x="0" y="0"/>
+            <a:chExt cx="9763125" cy="11410950"/>
+          </a:xfrm>
+        </p:grpSpPr>
+        <p:sp>
+          <p:nvSpPr>
+            <p:cNvPr id="10" name="Rectangle 9"/>
+            <p:cNvSpPr/>
+            <p:nvPr/>
+          </p:nvSpPr>
+          <p:spPr>
+            <a:xfrm>
+              <a:off x="8820150" y="9926955"/>
+              <a:ext cx="76200" cy="1122045"/>
+            </a:xfrm>
+            <a:prstGeom prst="rect">
+              <a:avLst/>
+            </a:prstGeom>
+            <a:solidFill>
+              <a:srgbClr val="7FA05A"/>
+            </a:solidFill>
+            <a:ln>
+              <a:noFill/>
+            </a:ln>
+            <a:effectLst/>
+          </p:spPr>
+          <p:style>
+            <a:lnRef idx="1">
+              <a:schemeClr val="accent1"/>
+            </a:lnRef>
+            <a:fillRef idx="3">
+              <a:schemeClr val="accent1"/>
+            </a:fillRef>
+            <a:effectRef idx="2">
+              <a:schemeClr val="accent1"/>
+            </a:effectRef>
+            <a:fontRef idx="minor">
+              <a:schemeClr val="lt1"/>
+            </a:fontRef>
+          </p:style>
+          <p:txBody>
+            <a:bodyPr rtlCol="0" anchor="ctr"/>
+            <a:lstStyle/>
+            <a:p>
+              <a:pPr algn="ctr"/>
+            </a:p>
+          </p:txBody>
+        </p:sp>
+        <p:sp>
+          <p:nvSpPr>
+            <p:cNvPr id="11" name="Oval 10"/>
+            <p:cNvSpPr/>
+            <p:nvPr/>
+          </p:nvSpPr>
+          <p:spPr>
+            <a:xfrm rot="8700000">
+              <a:off x="8134350" y="9673590"/>
+              <a:ext cx="723900" cy="361950"/>
+            </a:xfrm>
+            <a:prstGeom prst="ellipse">
+              <a:avLst/>
+            </a:prstGeom>
+            <a:solidFill>
+              <a:srgbClr val="59A66C"/>
+            </a:solidFill>
+            <a:ln w="57150">
+              <a:solidFill>
+                <a:srgbClr val="FFFFFF"/>
+              </a:solidFill>
+            </a:ln>
+            <a:effectLst/>
+          </p:spPr>
+          <p:style>
+            <a:lnRef idx="1">
+              <a:schemeClr val="accent1"/>
+            </a:lnRef>
+            <a:fillRef idx="3">
+              <a:schemeClr val="accent1"/>
+            </a:fillRef>
+            <a:effectRef idx="2">
+              <a:schemeClr val="accent1"/>
+            </a:effectRef>
+            <a:fontRef idx="minor">
+              <a:schemeClr val="lt1"/>
+            </a:fontRef>
+          </p:style>
+          <p:txBody>
+            <a:bodyPr rtlCol="0" anchor="ctr"/>
+            <a:lstStyle/>
+            <a:p>
+              <a:pPr algn="ctr"/>
+            </a:p>
+          </p:txBody>
+        </p:sp>
+        <p:sp>
+          <p:nvSpPr>
+            <p:cNvPr id="12" name="Oval 11"/>
+            <p:cNvSpPr/>
+            <p:nvPr/>
+          </p:nvSpPr>
+          <p:spPr>
+            <a:xfrm rot="2100000">
+              <a:off x="8858250" y="9673590"/>
+              <a:ext cx="723900" cy="361950"/>
+            </a:xfrm>
+            <a:prstGeom prst="ellipse">
+              <a:avLst/>
+            </a:prstGeom>
+            <a:solidFill>
+              <a:srgbClr val="59A66C"/>
+            </a:solidFill>
+            <a:ln w="57150">
+              <a:solidFill>
+                <a:srgbClr val="FFFFFF"/>
+              </a:solidFill>
+            </a:ln>
+            <a:effectLst/>
+          </p:spPr>
+          <p:style>
+            <a:lnRef idx="1">
+              <a:schemeClr val="accent1"/>
+            </a:lnRef>
+            <a:fillRef idx="3">
+              <a:schemeClr val="accent1"/>
+            </a:fillRef>
+            <a:effectRef idx="2">
+              <a:schemeClr val="accent1"/>
+            </a:effectRef>
+            <a:fontRef idx="minor">
+              <a:schemeClr val="lt1"/>
+            </a:fontRef>
+          </p:style>
+          <p:txBody>
+            <a:bodyPr rtlCol="0" anchor="ctr"/>
+            <a:lstStyle/>
+            <a:p>
+              <a:pPr algn="ctr"/>
+            </a:p>
+          </p:txBody>
+        </p:sp>
+        <p:sp>
+          <p:nvSpPr>
+            <p:cNvPr id="13" name="Oval 12"/>
+            <p:cNvSpPr/>
+            <p:nvPr/>
+          </p:nvSpPr>
+          <p:spPr>
+            <a:xfrm>
+              <a:off x="7953375" y="10868025"/>
+              <a:ext cx="1809750" cy="542925"/>
+            </a:xfrm>
+            <a:prstGeom prst="ellipse">
+              <a:avLst/>
+            </a:prstGeom>
+            <a:solidFill>
+              <a:srgbClr val="4F3433"/>
+            </a:solidFill>
+            <a:ln w="57150">
+              <a:solidFill>
+                <a:srgbClr val="FFFFFF"/>
+              </a:solidFill>
+            </a:ln>
+            <a:effectLst>
+              <a:outerShdw blurRad="228600" dist="76200" dir="5400000" algn="t" rotWithShape="0">
+                <a:srgbClr val="000000">
+                  <a:alpha val="30000"/>
+                </a:srgbClr>
+              </a:outerShdw>
+            </a:effectLst>
+          </p:spPr>
+          <p:style>
+            <a:lnRef idx="1">
+              <a:schemeClr val="accent1"/>
+            </a:lnRef>
+            <a:fillRef idx="3">
+              <a:schemeClr val="accent1"/>
+            </a:fillRef>
+            <a:effectRef idx="2">
+              <a:schemeClr val="accent1"/>
+            </a:effectRef>
+            <a:fontRef idx="minor">
+              <a:schemeClr val="lt1"/>
+            </a:fontRef>
+          </p:style>
+          <p:txBody>
+            <a:bodyPr rtlCol="0" anchor="ctr"/>
+            <a:lstStyle/>
+            <a:p>
+              <a:pPr algn="ctr"/>
+            </a:p>
+          </p:txBody>
+        </p:sp>
+        <p:sp>
+          <p:nvSpPr>
+            <p:cNvPr id="14" name="Oval 13"/>
+            <p:cNvSpPr/>
+            <p:nvPr/>
+          </p:nvSpPr>
+          <p:spPr>
+            <a:xfrm>
+              <a:off x="8722518" y="11078930"/>
+              <a:ext cx="48724" cy="48724"/>
+            </a:xfrm>
+            <a:prstGeom prst="ellipse">
+              <a:avLst/>
+            </a:prstGeom>
+            <a:solidFill>
+              <a:srgbClr val="F4F1EA"/>
+            </a:solidFill>
+            <a:ln>
+              <a:noFill/>
+            </a:ln>
+            <a:effectLst/>
+          </p:spPr>
+          <p:style>
+            <a:lnRef idx="1">
+              <a:schemeClr val="accent1"/>
+            </a:lnRef>
+            <a:fillRef idx="3">
+              <a:schemeClr val="accent1"/>
+            </a:fillRef>
+            <a:effectRef idx="2">
+              <a:schemeClr val="accent1"/>
+            </a:effectRef>
+            <a:fontRef idx="minor">
+              <a:schemeClr val="lt1"/>
+            </a:fontRef>
+          </p:style>
+          <p:txBody>
+            <a:bodyPr rtlCol="0" anchor="ctr"/>
+            <a:lstStyle/>
+            <a:p>
+              <a:pPr algn="ctr"/>
+            </a:p>
+          </p:txBody>
+        </p:sp>
+        <p:sp>
+          <p:nvSpPr>
+            <p:cNvPr id="15" name="Oval 14"/>
+            <p:cNvSpPr/>
+            <p:nvPr/>
+          </p:nvSpPr>
+          <p:spPr>
+            <a:xfrm>
+              <a:off x="8945257" y="11078930"/>
+              <a:ext cx="48724" cy="48724"/>
+            </a:xfrm>
+            <a:prstGeom prst="ellipse">
+              <a:avLst/>
+            </a:prstGeom>
+            <a:solidFill>
+              <a:srgbClr val="F4F1EA"/>
+            </a:solidFill>
+            <a:ln>
+              <a:noFill/>
+            </a:ln>
+            <a:effectLst/>
+          </p:spPr>
+          <p:style>
+            <a:lnRef idx="1">
+              <a:schemeClr val="accent1"/>
+            </a:lnRef>
+            <a:fillRef idx="3">
+              <a:schemeClr val="accent1"/>
+            </a:fillRef>
+            <a:effectRef idx="2">
+              <a:schemeClr val="accent1"/>
+            </a:effectRef>
+            <a:fontRef idx="minor">
+              <a:schemeClr val="lt1"/>
+            </a:fontRef>
+          </p:style>
+          <p:txBody>
+            <a:bodyPr rtlCol="0" anchor="ctr"/>
+            <a:lstStyle/>
+            <a:p>
+              <a:pPr algn="ctr"/>
+            </a:p>
+          </p:txBody>
+        </p:sp>
+        <p:sp>
+          <p:nvSpPr>
+            <p:cNvPr id="16" name="Block Arc 15"/>
+            <p:cNvSpPr/>
+            <p:nvPr/>
+          </p:nvSpPr>
+          <p:spPr>
+            <a:xfrm rot="10800000">
+              <a:off x="8781683" y="11117213"/>
+              <a:ext cx="153132" cy="111369"/>
+            </a:xfrm>
+            <a:prstGeom prst="blockArc">
+              <a:avLst>
+                <a:gd name="adj1" fmla="val 10800000"/>
+                <a:gd name="adj2" fmla="val 0"/>
+                <a:gd name="adj3" fmla="val 18000"/>
+              </a:avLst>
+            </a:prstGeom>
+            <a:solidFill>
+              <a:srgbClr val="F4F1EA"/>
+            </a:solidFill>
+            <a:ln>
+              <a:noFill/>
+            </a:ln>
+            <a:effectLst/>
+          </p:spPr>
+          <p:style>
+            <a:lnRef idx="1">
+              <a:schemeClr val="accent1"/>
+            </a:lnRef>
+            <a:fillRef idx="3">
+              <a:schemeClr val="accent1"/>
+            </a:fillRef>
+            <a:effectRef idx="2">
+              <a:schemeClr val="accent1"/>
+            </a:effectRef>
+            <a:fontRef idx="minor">
+              <a:schemeClr val="lt1"/>
+            </a:fontRef>
+          </p:style>
+          <p:txBody>
+            <a:bodyPr rtlCol="0" anchor="ctr"/>
+            <a:lstStyle/>
+            <a:p>
+              <a:pPr algn="ctr"/>
+            </a:p>
+          </p:txBody>
+        </p:sp>
+      </p:grpSp>
+      <p:sp>
+        <p:nvSpPr>
+          <p:cNvPr id="17" name="Rounded Rectangle 16"/>
           <p:cNvSpPr/>
           <p:nvPr/>
         </p:nvSpPr>
@@ -3656,7 +4161,7 @@
       </p:sp>
       <p:sp>
         <p:nvSpPr>
-          <p:cNvPr id="6" name="TextBox 5"/>
+          <p:cNvPr id="18" name="TextBox 17"/>
           <p:cNvSpPr txBox="1"/>
           <p:nvPr/>
         </p:nvSpPr>
@@ -3695,14 +4200,14 @@
       </p:sp>
       <p:sp>
         <p:nvSpPr>
-          <p:cNvPr id="7" name="TextBox 6"/>
+          <p:cNvPr id="19" name="TextBox 18"/>
           <p:cNvSpPr txBox="1"/>
           <p:nvPr/>
         </p:nvSpPr>
         <p:spPr>
           <a:xfrm>
             <a:off x="762000" y="9620250"/>
-            <a:ext cx="8572500" cy="857250"/>
+            <a:ext cx="7620000" cy="857250"/>
           </a:xfrm>
           <a:prstGeom prst="rect">
             <a:avLst/>
@@ -3734,14 +4239,14 @@
       </p:sp>
       <p:sp>
         <p:nvSpPr>
-          <p:cNvPr id="8" name="TextBox 7"/>
+          <p:cNvPr id="20" name="TextBox 19"/>
           <p:cNvSpPr txBox="1"/>
           <p:nvPr/>
         </p:nvSpPr>
         <p:spPr>
           <a:xfrm>
             <a:off x="762000" y="10525125"/>
-            <a:ext cx="7620000" cy="476250"/>
+            <a:ext cx="7239000" cy="476250"/>
           </a:xfrm>
           <a:prstGeom prst="rect">
             <a:avLst/>
@@ -3773,14 +4278,14 @@
       </p:sp>
       <p:pic>
         <p:nvPicPr>
-          <p:cNvPr id="9" name="Picture 8" descr="foundation-logo-white.png"/>
+          <p:cNvPr id="21" name="Picture 20" descr="foundation-logo-white.png"/>
           <p:cNvPicPr>
             <a:picLocks noChangeAspect="1"/>
           </p:cNvPicPr>
           <p:nvPr/>
         </p:nvPicPr>
         <p:blipFill>
-          <a:blip r:embed="rId5"/>
+          <a:blip r:embed="rId6"/>
           <a:stretch>
             <a:fillRect/>
           </a:stretch>
